--- a/prospecção/abordagem/Argus_OnePager_Banco.pptx
+++ b/prospecção/abordagem/Argus_OnePager_Banco.pptx
@@ -3142,7 +3142,7 @@
       </p:sp>
       <p:pic>
         <p:nvPicPr>
-          <p:cNvPr id="3" name="Picture 2" descr="favicon_argus.png"/>
+          <p:cNvPr id="3" name="Picture 2" descr="logo_argus_branca.png"/>
           <p:cNvPicPr>
             <a:picLocks noChangeAspect="1"/>
           </p:cNvPicPr>
@@ -3156,8 +3156,8 @@
         </p:blipFill>
         <p:spPr>
           <a:xfrm>
-            <a:off x="667512" y="667512"/>
-            <a:ext cx="457200" cy="457200"/>
+            <a:off x="640080" y="566928"/>
+            <a:ext cx="1864852" cy="566928"/>
           </a:xfrm>
           <a:prstGeom prst="rect">
             <a:avLst/>
@@ -3172,8 +3172,8 @@
         </p:nvSpPr>
         <p:spPr>
           <a:xfrm>
-            <a:off x="1207007" y="658368"/>
-            <a:ext cx="3657600" cy="365760"/>
+            <a:off x="658368" y="1225296"/>
+            <a:ext cx="5486400" cy="274320"/>
           </a:xfrm>
           <a:prstGeom prst="rect">
             <a:avLst/>
@@ -3198,27 +3198,73 @@
               </a:spcAft>
             </a:pPr>
             <a:r>
-              <a:rPr sz="2000" b="1" i="0" spc="50">
+              <a:rPr sz="750" b="0" i="0" spc="150">
+                <a:solidFill>
+                  <a:srgbClr val="A8B6C6"/>
+                </a:solidFill>
+                <a:latin typeface="Consolas"/>
+              </a:rPr>
+              <a:t>ADMINISTRAÇÃO FIDUCIÁRIA E CUSTÓDIA DE FUNDOS</a:t>
+            </a:r>
+          </a:p>
+        </p:txBody>
+      </p:sp>
+      <p:sp>
+        <p:nvSpPr>
+          <p:cNvPr id="5" name="TextBox 4"/>
+          <p:cNvSpPr txBox="1"/>
+          <p:nvPr/>
+        </p:nvSpPr>
+        <p:spPr>
+          <a:xfrm>
+            <a:off x="640080" y="1536192"/>
+            <a:ext cx="6281927" cy="822960"/>
+          </a:xfrm>
+          <a:prstGeom prst="rect">
+            <a:avLst/>
+          </a:prstGeom>
+          <a:noFill/>
+        </p:spPr>
+        <p:txBody>
+          <a:bodyPr wrap="square" lIns="0" rIns="0" tIns="0" bIns="0" anchor="t">
+            <a:spAutoFit/>
+          </a:bodyPr>
+          <a:lstStyle/>
+          <a:p>
+            <a:pPr algn="l">
+              <a:lnSpc>
+                <a:spcPct val="106000"/>
+              </a:lnSpc>
+              <a:spcBef>
+                <a:spcPts val="0"/>
+              </a:spcBef>
+              <a:spcAft>
+                <a:spcPts val="0"/>
+              </a:spcAft>
+            </a:pPr>
+            <a:r>
+              <a:rPr sz="2100" b="0" i="0">
                 <a:solidFill>
                   <a:srgbClr val="F3F6FA"/>
                 </a:solidFill>
                 <a:latin typeface="Georgia"/>
               </a:rPr>
-              <a:t>ARGUS</a:t>
-            </a:r>
-          </a:p>
-        </p:txBody>
-      </p:sp>
-      <p:sp>
-        <p:nvSpPr>
-          <p:cNvPr id="5" name="TextBox 4"/>
+              <a:t>Uma nova linha de receita recorrente
+para o seu banco.</a:t>
+            </a:r>
+          </a:p>
+        </p:txBody>
+      </p:sp>
+      <p:sp>
+        <p:nvSpPr>
+          <p:cNvPr id="6" name="TextBox 5"/>
           <p:cNvSpPr txBox="1"/>
           <p:nvPr/>
         </p:nvSpPr>
         <p:spPr>
           <a:xfrm>
-            <a:off x="1225295" y="1097280"/>
-            <a:ext cx="5486400" cy="274320"/>
+            <a:off x="640080" y="2212848"/>
+            <a:ext cx="6281927" cy="274320"/>
           </a:xfrm>
           <a:prstGeom prst="rect">
             <a:avLst/>
@@ -3243,97 +3289,6 @@
               </a:spcAft>
             </a:pPr>
             <a:r>
-              <a:rPr sz="750" b="0" i="0" spc="150">
-                <a:solidFill>
-                  <a:srgbClr val="A8B6C6"/>
-                </a:solidFill>
-                <a:latin typeface="Consolas"/>
-              </a:rPr>
-              <a:t>ADMINISTRAÇÃO FIDUCIÁRIA E CUSTÓDIA DE FUNDOS</a:t>
-            </a:r>
-          </a:p>
-        </p:txBody>
-      </p:sp>
-      <p:sp>
-        <p:nvSpPr>
-          <p:cNvPr id="6" name="TextBox 5"/>
-          <p:cNvSpPr txBox="1"/>
-          <p:nvPr/>
-        </p:nvSpPr>
-        <p:spPr>
-          <a:xfrm>
-            <a:off x="640080" y="1536192"/>
-            <a:ext cx="6281927" cy="822960"/>
-          </a:xfrm>
-          <a:prstGeom prst="rect">
-            <a:avLst/>
-          </a:prstGeom>
-          <a:noFill/>
-        </p:spPr>
-        <p:txBody>
-          <a:bodyPr wrap="square" lIns="0" rIns="0" tIns="0" bIns="0" anchor="t">
-            <a:spAutoFit/>
-          </a:bodyPr>
-          <a:lstStyle/>
-          <a:p>
-            <a:pPr algn="l">
-              <a:lnSpc>
-                <a:spcPct val="106000"/>
-              </a:lnSpc>
-              <a:spcBef>
-                <a:spcPts val="0"/>
-              </a:spcBef>
-              <a:spcAft>
-                <a:spcPts val="0"/>
-              </a:spcAft>
-            </a:pPr>
-            <a:r>
-              <a:rPr sz="2100" b="0" i="0">
-                <a:solidFill>
-                  <a:srgbClr val="F3F6FA"/>
-                </a:solidFill>
-                <a:latin typeface="Georgia"/>
-              </a:rPr>
-              <a:t>Uma nova linha de receita recorrente
-para o seu banco.</a:t>
-            </a:r>
-          </a:p>
-        </p:txBody>
-      </p:sp>
-      <p:sp>
-        <p:nvSpPr>
-          <p:cNvPr id="7" name="TextBox 6"/>
-          <p:cNvSpPr txBox="1"/>
-          <p:nvPr/>
-        </p:nvSpPr>
-        <p:spPr>
-          <a:xfrm>
-            <a:off x="640080" y="2212848"/>
-            <a:ext cx="6281927" cy="274320"/>
-          </a:xfrm>
-          <a:prstGeom prst="rect">
-            <a:avLst/>
-          </a:prstGeom>
-          <a:noFill/>
-        </p:spPr>
-        <p:txBody>
-          <a:bodyPr wrap="square" lIns="0" rIns="0" tIns="0" bIns="0" anchor="t">
-            <a:spAutoFit/>
-          </a:bodyPr>
-          <a:lstStyle/>
-          <a:p>
-            <a:pPr algn="l">
-              <a:lnSpc>
-                <a:spcPct val="100000"/>
-              </a:lnSpc>
-              <a:spcBef>
-                <a:spcPts val="0"/>
-              </a:spcBef>
-              <a:spcAft>
-                <a:spcPts val="0"/>
-              </a:spcAft>
-            </a:pPr>
-            <a:r>
               <a:rPr sz="1000" b="0" i="1">
                 <a:solidFill>
                   <a:srgbClr val="1FC0EF"/>
@@ -3347,7 +3302,7 @@
       </p:sp>
       <p:cxnSp>
         <p:nvCxnSpPr>
-          <p:cNvPr id="8" name="Connector 7"/>
+          <p:cNvPr id="7" name="Connector 6"/>
           <p:cNvCxnSpPr/>
           <p:nvPr/>
         </p:nvCxnSpPr>
@@ -3383,7 +3338,7 @@
       </p:cxnSp>
       <p:sp>
         <p:nvSpPr>
-          <p:cNvPr id="9" name="TextBox 8"/>
+          <p:cNvPr id="8" name="TextBox 7"/>
           <p:cNvSpPr txBox="1"/>
           <p:nvPr/>
         </p:nvSpPr>
@@ -3428,7 +3383,7 @@
       </p:sp>
       <p:sp>
         <p:nvSpPr>
-          <p:cNvPr id="10" name="TextBox 9"/>
+          <p:cNvPr id="9" name="TextBox 8"/>
           <p:cNvSpPr txBox="1"/>
           <p:nvPr/>
         </p:nvSpPr>
@@ -3473,7 +3428,7 @@
       </p:sp>
       <p:cxnSp>
         <p:nvCxnSpPr>
-          <p:cNvPr id="11" name="Connector 10"/>
+          <p:cNvPr id="10" name="Connector 9"/>
           <p:cNvCxnSpPr/>
           <p:nvPr/>
         </p:nvCxnSpPr>
@@ -3509,7 +3464,7 @@
       </p:cxnSp>
       <p:sp>
         <p:nvSpPr>
-          <p:cNvPr id="12" name="TextBox 11"/>
+          <p:cNvPr id="11" name="TextBox 10"/>
           <p:cNvSpPr txBox="1"/>
           <p:nvPr/>
         </p:nvSpPr>
@@ -3554,7 +3509,7 @@
       </p:sp>
       <p:sp>
         <p:nvSpPr>
-          <p:cNvPr id="13" name="Oval 12"/>
+          <p:cNvPr id="12" name="Oval 11"/>
           <p:cNvSpPr/>
           <p:nvPr/>
         </p:nvSpPr>
@@ -3598,7 +3553,7 @@
       </p:sp>
       <p:sp>
         <p:nvSpPr>
-          <p:cNvPr id="14" name="TextBox 13"/>
+          <p:cNvPr id="13" name="TextBox 12"/>
           <p:cNvSpPr txBox="1"/>
           <p:nvPr/>
         </p:nvSpPr>
@@ -3643,7 +3598,7 @@
       </p:sp>
       <p:sp>
         <p:nvSpPr>
-          <p:cNvPr id="15" name="Oval 14"/>
+          <p:cNvPr id="14" name="Oval 13"/>
           <p:cNvSpPr/>
           <p:nvPr/>
         </p:nvSpPr>
@@ -3687,7 +3642,7 @@
       </p:sp>
       <p:sp>
         <p:nvSpPr>
-          <p:cNvPr id="16" name="TextBox 15"/>
+          <p:cNvPr id="15" name="TextBox 14"/>
           <p:cNvSpPr txBox="1"/>
           <p:nvPr/>
         </p:nvSpPr>
@@ -3732,7 +3687,7 @@
       </p:sp>
       <p:sp>
         <p:nvSpPr>
-          <p:cNvPr id="17" name="Oval 16"/>
+          <p:cNvPr id="16" name="Oval 15"/>
           <p:cNvSpPr/>
           <p:nvPr/>
         </p:nvSpPr>
@@ -3776,7 +3731,7 @@
       </p:sp>
       <p:sp>
         <p:nvSpPr>
-          <p:cNvPr id="18" name="TextBox 17"/>
+          <p:cNvPr id="17" name="TextBox 16"/>
           <p:cNvSpPr txBox="1"/>
           <p:nvPr/>
         </p:nvSpPr>
@@ -3821,7 +3776,7 @@
       </p:sp>
       <p:sp>
         <p:nvSpPr>
-          <p:cNvPr id="19" name="Oval 18"/>
+          <p:cNvPr id="18" name="Oval 17"/>
           <p:cNvSpPr/>
           <p:nvPr/>
         </p:nvSpPr>
@@ -3865,7 +3820,7 @@
       </p:sp>
       <p:sp>
         <p:nvSpPr>
-          <p:cNvPr id="20" name="TextBox 19"/>
+          <p:cNvPr id="19" name="TextBox 18"/>
           <p:cNvSpPr txBox="1"/>
           <p:nvPr/>
         </p:nvSpPr>
@@ -3910,7 +3865,7 @@
       </p:sp>
       <p:sp>
         <p:nvSpPr>
-          <p:cNvPr id="21" name="Rounded Rectangle 20"/>
+          <p:cNvPr id="20" name="Rounded Rectangle 19"/>
           <p:cNvSpPr/>
           <p:nvPr/>
         </p:nvSpPr>
@@ -3958,7 +3913,7 @@
       </p:sp>
       <p:sp>
         <p:nvSpPr>
-          <p:cNvPr id="22" name="TextBox 21"/>
+          <p:cNvPr id="21" name="TextBox 20"/>
           <p:cNvSpPr txBox="1"/>
           <p:nvPr/>
         </p:nvSpPr>
@@ -4003,7 +3958,7 @@
       </p:sp>
       <p:sp>
         <p:nvSpPr>
-          <p:cNvPr id="23" name="TextBox 22"/>
+          <p:cNvPr id="22" name="TextBox 21"/>
           <p:cNvSpPr txBox="1"/>
           <p:nvPr/>
         </p:nvSpPr>
@@ -4048,7 +4003,7 @@
       </p:sp>
       <p:cxnSp>
         <p:nvCxnSpPr>
-          <p:cNvPr id="24" name="Connector 23"/>
+          <p:cNvPr id="23" name="Connector 22"/>
           <p:cNvCxnSpPr/>
           <p:nvPr/>
         </p:nvCxnSpPr>
@@ -4084,7 +4039,7 @@
       </p:cxnSp>
       <p:sp>
         <p:nvSpPr>
-          <p:cNvPr id="25" name="TextBox 24"/>
+          <p:cNvPr id="24" name="TextBox 23"/>
           <p:cNvSpPr txBox="1"/>
           <p:nvPr/>
         </p:nvSpPr>
@@ -4129,7 +4084,7 @@
       </p:sp>
       <p:sp>
         <p:nvSpPr>
-          <p:cNvPr id="26" name="TextBox 25"/>
+          <p:cNvPr id="25" name="TextBox 24"/>
           <p:cNvSpPr txBox="1"/>
           <p:nvPr/>
         </p:nvSpPr>
@@ -4174,7 +4129,7 @@
       </p:sp>
       <p:sp>
         <p:nvSpPr>
-          <p:cNvPr id="27" name="Rounded Rectangle 26"/>
+          <p:cNvPr id="26" name="Rounded Rectangle 25"/>
           <p:cNvSpPr/>
           <p:nvPr/>
         </p:nvSpPr>
@@ -4220,7 +4175,7 @@
       </p:sp>
       <p:sp>
         <p:nvSpPr>
-          <p:cNvPr id="28" name="TextBox 27"/>
+          <p:cNvPr id="27" name="TextBox 26"/>
           <p:cNvSpPr txBox="1"/>
           <p:nvPr/>
         </p:nvSpPr>
@@ -4265,7 +4220,7 @@
       </p:sp>
       <p:sp>
         <p:nvSpPr>
-          <p:cNvPr id="29" name="TextBox 28"/>
+          <p:cNvPr id="28" name="TextBox 27"/>
           <p:cNvSpPr txBox="1"/>
           <p:nvPr/>
         </p:nvSpPr>
@@ -4310,7 +4265,7 @@
       </p:sp>
       <p:sp>
         <p:nvSpPr>
-          <p:cNvPr id="30" name="TextBox 29"/>
+          <p:cNvPr id="29" name="TextBox 28"/>
           <p:cNvSpPr txBox="1"/>
           <p:nvPr/>
         </p:nvSpPr>
@@ -4399,14 +4354,14 @@
       </p:sp>
       <p:sp>
         <p:nvSpPr>
-          <p:cNvPr id="31" name="Rounded Rectangle 30"/>
+          <p:cNvPr id="30" name="Rounded Rectangle 29"/>
           <p:cNvSpPr/>
           <p:nvPr/>
         </p:nvSpPr>
         <p:spPr>
           <a:xfrm>
-            <a:off x="640080" y="9729216"/>
-            <a:ext cx="6281927" cy="402336"/>
+            <a:off x="640080" y="9656064"/>
+            <a:ext cx="6281927" cy="512064"/>
           </a:xfrm>
           <a:prstGeom prst="roundRect">
             <a:avLst>
@@ -4447,14 +4402,14 @@
       </p:sp>
       <p:sp>
         <p:nvSpPr>
-          <p:cNvPr id="32" name="TextBox 31"/>
+          <p:cNvPr id="31" name="TextBox 30"/>
           <p:cNvSpPr txBox="1"/>
           <p:nvPr/>
         </p:nvSpPr>
         <p:spPr>
           <a:xfrm>
-            <a:off x="896112" y="9838944"/>
-            <a:ext cx="5769863" cy="274320"/>
+            <a:off x="896112" y="9756648"/>
+            <a:ext cx="5769863" cy="329184"/>
           </a:xfrm>
           <a:prstGeom prst="rect">
             <a:avLst/>
@@ -4469,7 +4424,7 @@
           <a:p>
             <a:pPr algn="l">
               <a:lnSpc>
-                <a:spcPct val="100000"/>
+                <a:spcPct val="112000"/>
               </a:lnSpc>
               <a:spcBef>
                 <a:spcPts val="0"/>
@@ -4479,35 +4434,26 @@
               </a:spcAft>
             </a:pPr>
             <a:r>
-              <a:rPr sz="900" b="1" i="0" spc="120">
-                <a:solidFill>
-                  <a:srgbClr val="6A50AC"/>
-                </a:solidFill>
-                <a:latin typeface="Consolas"/>
-              </a:rPr>
-              <a:t>PRÓXIMO PASSO   </a:t>
-            </a:r>
-            <a:r>
-              <a:rPr sz="1050" b="0" i="0">
+              <a:rPr sz="1050" b="0" i="1">
                 <a:solidFill>
                   <a:srgbClr val="2B3232"/>
                 </a:solidFill>
-                <a:latin typeface="Calibri"/>
+                <a:latin typeface="Georgia"/>
               </a:rPr>
-              <a:t>20 minutos, sem compromisso — basta responder o e-mail.</a:t>
+              <a:t>Queremos apresentar a conta exata para o seu banco — 20 minutos com quem construiu a plataforma. É só responder o e-mail que trouxe esta página.</a:t>
             </a:r>
           </a:p>
         </p:txBody>
       </p:sp>
       <p:cxnSp>
         <p:nvCxnSpPr>
-          <p:cNvPr id="33" name="Connector 32"/>
+          <p:cNvPr id="32" name="Connector 31"/>
           <p:cNvCxnSpPr/>
           <p:nvPr/>
         </p:nvCxnSpPr>
         <p:spPr>
           <a:xfrm>
-            <a:off x="640080" y="10122408"/>
+            <a:off x="640080" y="10232136"/>
             <a:ext cx="6281927" cy="0"/>
           </a:xfrm>
           <a:prstGeom prst="line">
@@ -4537,13 +4483,13 @@
       </p:cxnSp>
       <p:sp>
         <p:nvSpPr>
-          <p:cNvPr id="34" name="TextBox 33"/>
+          <p:cNvPr id="33" name="TextBox 32"/>
           <p:cNvSpPr txBox="1"/>
           <p:nvPr/>
         </p:nvSpPr>
         <p:spPr>
           <a:xfrm>
-            <a:off x="640080" y="10232136"/>
+            <a:off x="640080" y="10341863"/>
             <a:ext cx="3840480" cy="228600"/>
           </a:xfrm>
           <a:prstGeom prst="rect">
@@ -4582,13 +4528,13 @@
       </p:sp>
       <p:sp>
         <p:nvSpPr>
-          <p:cNvPr id="35" name="TextBox 34"/>
+          <p:cNvPr id="34" name="TextBox 33"/>
           <p:cNvSpPr txBox="1"/>
           <p:nvPr/>
         </p:nvSpPr>
         <p:spPr>
           <a:xfrm>
-            <a:off x="4270248" y="10232136"/>
+            <a:off x="4270248" y="10341863"/>
             <a:ext cx="2651760" cy="228600"/>
           </a:xfrm>
           <a:prstGeom prst="rect">

--- a/prospecção/abordagem/Argus_OnePager_Banco.pptx
+++ b/prospecção/abordagem/Argus_OnePager_Banco.pptx
@@ -3105,7 +3105,7 @@
         <p:spPr>
           <a:xfrm>
             <a:off x="0" y="0"/>
-            <a:ext cx="7562088" cy="2514600"/>
+            <a:ext cx="7562088" cy="2212848"/>
           </a:xfrm>
           <a:prstGeom prst="rect">
             <a:avLst/>
@@ -3156,8 +3156,8 @@
         </p:blipFill>
         <p:spPr>
           <a:xfrm>
-            <a:off x="640080" y="566928"/>
-            <a:ext cx="1864852" cy="566928"/>
+            <a:off x="640080" y="384048"/>
+            <a:ext cx="1624226" cy="493776"/>
           </a:xfrm>
           <a:prstGeom prst="rect">
             <a:avLst/>
@@ -3172,7 +3172,7 @@
         </p:nvSpPr>
         <p:spPr>
           <a:xfrm>
-            <a:off x="658368" y="1225296"/>
+            <a:off x="658368" y="960120"/>
             <a:ext cx="5486400" cy="274320"/>
           </a:xfrm>
           <a:prstGeom prst="rect">
@@ -3217,8 +3217,8 @@
         </p:nvSpPr>
         <p:spPr>
           <a:xfrm>
-            <a:off x="640080" y="1536192"/>
-            <a:ext cx="6281927" cy="822960"/>
+            <a:off x="640080" y="1243584"/>
+            <a:ext cx="6281927" cy="731520"/>
           </a:xfrm>
           <a:prstGeom prst="rect">
             <a:avLst/>
@@ -3243,14 +3243,14 @@
               </a:spcAft>
             </a:pPr>
             <a:r>
-              <a:rPr sz="2100" b="0" i="0">
+              <a:rPr sz="1900" b="0" i="0">
                 <a:solidFill>
                   <a:srgbClr val="F3F6FA"/>
                 </a:solidFill>
                 <a:latin typeface="Georgia"/>
               </a:rPr>
-              <a:t>Uma nova linha de receita recorrente
-para o seu banco.</a:t>
+              <a:t>Fundos viáveis a partir de R$ 1 milhão —
+e o papel do seu banco nisso.</a:t>
             </a:r>
           </a:p>
         </p:txBody>
@@ -3263,8 +3263,8 @@
         </p:nvSpPr>
         <p:spPr>
           <a:xfrm>
-            <a:off x="640080" y="2212848"/>
-            <a:ext cx="6281927" cy="274320"/>
+            <a:off x="640080" y="1920240"/>
+            <a:ext cx="6281927" cy="256032"/>
           </a:xfrm>
           <a:prstGeom prst="rect">
             <a:avLst/>
@@ -3289,13 +3289,13 @@
               </a:spcAft>
             </a:pPr>
             <a:r>
-              <a:rPr sz="1000" b="0" i="1">
+              <a:rPr sz="950" b="0" i="1">
                 <a:solidFill>
                   <a:srgbClr val="1FC0EF"/>
                 </a:solidFill>
                 <a:latin typeface="Calibri"/>
               </a:rPr>
-              <a:t>Administração fiduciária e custódia de fundos — proposta de parceria.</a:t>
+              <a:t>Onde nasce o custo que mata o fundo pequeno, como ele desaparece, e o que propomos ao banco.</a:t>
             </a:r>
           </a:p>
         </p:txBody>
@@ -3308,7 +3308,7 @@
         </p:nvCxnSpPr>
         <p:spPr>
           <a:xfrm>
-            <a:off x="640080" y="2862072"/>
+            <a:off x="640080" y="2432304"/>
             <a:ext cx="219456" cy="0"/>
           </a:xfrm>
           <a:prstGeom prst="line">
@@ -3344,8 +3344,8 @@
         </p:nvSpPr>
         <p:spPr>
           <a:xfrm>
-            <a:off x="950976" y="2788920"/>
-            <a:ext cx="5486400" cy="228600"/>
+            <a:off x="950976" y="2359152"/>
+            <a:ext cx="6035040" cy="228600"/>
           </a:xfrm>
           <a:prstGeom prst="rect">
             <a:avLst/>
@@ -3376,7 +3376,7 @@
                 </a:solidFill>
                 <a:latin typeface="Consolas"/>
               </a:rPr>
-              <a:t>A PROPOSTA</a:t>
+              <a:t>A IDEIA, DIRETO AO PONTO</a:t>
             </a:r>
           </a:p>
         </p:txBody>
@@ -3389,8 +3389,8 @@
         </p:nvSpPr>
         <p:spPr>
           <a:xfrm>
-            <a:off x="640080" y="3081527"/>
-            <a:ext cx="6281927" cy="1005840"/>
+            <a:off x="640080" y="2615184"/>
+            <a:ext cx="6281927" cy="676656"/>
           </a:xfrm>
           <a:prstGeom prst="rect">
             <a:avLst/>
@@ -3405,7 +3405,7 @@
           <a:p>
             <a:pPr algn="l">
               <a:lnSpc>
-                <a:spcPct val="122000"/>
+                <a:spcPct val="114000"/>
               </a:lnSpc>
               <a:spcBef>
                 <a:spcPts val="0"/>
@@ -3415,13 +3415,13 @@
               </a:spcAft>
             </a:pPr>
             <a:r>
-              <a:rPr sz="1050" b="0" i="0">
+              <a:rPr sz="960" b="0" i="0">
                 <a:solidFill>
                   <a:srgbClr val="2B3232"/>
                 </a:solidFill>
                 <a:latin typeface="Calibri"/>
               </a:rPr>
-              <a:t>Vocês entram com a licença e a estrutura que já têm; a Argus entra com a tecnologia e a operação como prestadora de serviço — vocês continuam o administrador de verdade, com o compliance de vocês no controle. Atendemos juntos um mercado que os grandes decidiram ignorar: fundos de R$ 1–10 milhões. A receita de administração começa dividida 50/50 — e vocês não investem em tecnologia nem contratam equipe.</a:t>
+              <a:t>Estamos estruturando uma operação de DTVM para o vazio que os grandes administradores criaram: fundos de investimento de menor patrimônio. Com tecnologia própria, constituímos e administramos fundos de forma rápida e barata — com o objetivo declarado de operar a taxa de administração fiduciária MAIS COMPETITIVA do mercado brasileiro, sem abrir mão de nenhum controle fiduciário. Só 1.277 dos ~31 mil fundos do país passam de R$ 1 bilhão: a cauda é enorme e está sem dono.</a:t>
             </a:r>
           </a:p>
         </p:txBody>
@@ -3434,7 +3434,7 @@
         </p:nvCxnSpPr>
         <p:spPr>
           <a:xfrm>
-            <a:off x="640080" y="4142232"/>
+            <a:off x="640080" y="3419856"/>
             <a:ext cx="219456" cy="0"/>
           </a:xfrm>
           <a:prstGeom prst="line">
@@ -3470,8 +3470,8 @@
         </p:nvSpPr>
         <p:spPr>
           <a:xfrm>
-            <a:off x="950976" y="4069080"/>
-            <a:ext cx="5486400" cy="228600"/>
+            <a:off x="950976" y="3346704"/>
+            <a:ext cx="6035040" cy="228600"/>
           </a:xfrm>
           <a:prstGeom prst="rect">
             <a:avLst/>
@@ -3502,30 +3502,79 @@
                 </a:solidFill>
                 <a:latin typeface="Consolas"/>
               </a:rPr>
-              <a:t>POR QUE FAZ SENTIDO PARA O SEU BANCO</a:t>
-            </a:r>
-          </a:p>
-        </p:txBody>
-      </p:sp>
-      <p:sp>
-        <p:nvSpPr>
-          <p:cNvPr id="12" name="Oval 11"/>
+              <a:t>POR QUE FUNDO PEQUENO HOJE É INVIÁVEL</a:t>
+            </a:r>
+          </a:p>
+        </p:txBody>
+      </p:sp>
+      <p:sp>
+        <p:nvSpPr>
+          <p:cNvPr id="12" name="TextBox 11"/>
+          <p:cNvSpPr txBox="1"/>
+          <p:nvPr/>
+        </p:nvSpPr>
+        <p:spPr>
+          <a:xfrm>
+            <a:off x="640080" y="3602736"/>
+            <a:ext cx="6281927" cy="822960"/>
+          </a:xfrm>
+          <a:prstGeom prst="rect">
+            <a:avLst/>
+          </a:prstGeom>
+          <a:noFill/>
+        </p:spPr>
+        <p:txBody>
+          <a:bodyPr wrap="square" lIns="0" rIns="0" tIns="0" bIns="0" anchor="t">
+            <a:spAutoFit/>
+          </a:bodyPr>
+          <a:lstStyle/>
+          <a:p>
+            <a:pPr algn="l">
+              <a:lnSpc>
+                <a:spcPct val="114000"/>
+              </a:lnSpc>
+              <a:spcBef>
+                <a:spcPts val="0"/>
+              </a:spcBef>
+              <a:spcAft>
+                <a:spcPts val="0"/>
+              </a:spcAft>
+            </a:pPr>
+            <a:r>
+              <a:rPr sz="960" b="0" i="0">
+                <a:solidFill>
+                  <a:srgbClr val="2B3232"/>
+                </a:solidFill>
+                <a:latin typeface="Calibri"/>
+              </a:rPr>
+              <a:t>Hoje, constituir um fundo só fecha a conta a partir de ~R$ 20 milhões de patrimônio: os pisos das administradoras tradicionais (R$ 12–25 mil/mês somando administração, custódia e controladoria) impõem R$ 150–300 mil de custo fixo por ano. Num fundo de R$ 5 milhões, isso consome 3–6% do patrimônio ao ano antes de qualquer resultado — inviável por definição. O gestor emergente fica preso a clube de investimento ou carteira administrada. O nosso barateamento é grande o suficiente para inverter essa conta: fundo viável a partir de R$ 1 milhão de PL.</a:t>
+            </a:r>
+          </a:p>
+        </p:txBody>
+      </p:sp>
+      <p:sp>
+        <p:nvSpPr>
+          <p:cNvPr id="13" name="Rounded Rectangle 12"/>
           <p:cNvSpPr/>
           <p:nvPr/>
         </p:nvSpPr>
         <p:spPr>
           <a:xfrm>
-            <a:off x="649224" y="4443984"/>
-            <a:ext cx="73152" cy="73152"/>
-          </a:xfrm>
-          <a:prstGeom prst="ellipse">
-            <a:avLst/>
+            <a:off x="640080" y="4517136"/>
+            <a:ext cx="1996439" cy="621792"/>
+          </a:xfrm>
+          <a:prstGeom prst="roundRect">
+            <a:avLst>
+              <a:gd name="adj" fmla="val 9000"/>
+            </a:avLst>
           </a:prstGeom>
           <a:solidFill>
-            <a:srgbClr val="1FC0EF"/>
+            <a:srgbClr val="F4F5FB"/>
           </a:solidFill>
-          <a:ln>
-            <a:noFill/>
+          <a:ln w="9525">
+            <a:solidFill>
+              <a:srgbClr val="E7E8F2"/>
+            </a:solidFill>
           </a:ln>
           <a:effectLst/>
         </p:spPr>
@@ -3553,14 +3602,14 @@
       </p:sp>
       <p:sp>
         <p:nvSpPr>
-          <p:cNvPr id="13" name="TextBox 12"/>
+          <p:cNvPr id="14" name="TextBox 13"/>
           <p:cNvSpPr txBox="1"/>
           <p:nvPr/>
         </p:nvSpPr>
         <p:spPr>
           <a:xfrm>
-            <a:off x="841247" y="4398264"/>
-            <a:ext cx="6080759" cy="475488"/>
+            <a:off x="768096" y="4590288"/>
+            <a:ext cx="1740407" cy="274320"/>
           </a:xfrm>
           <a:prstGeom prst="rect">
             <a:avLst/>
@@ -3575,7 +3624,7 @@
           <a:p>
             <a:pPr algn="l">
               <a:lnSpc>
-                <a:spcPct val="114000"/>
+                <a:spcPct val="100000"/>
               </a:lnSpc>
               <a:spcBef>
                 <a:spcPts val="0"/>
@@ -3585,36 +3634,85 @@
               </a:spcAft>
             </a:pPr>
             <a:r>
-              <a:rPr sz="1050" b="0" i="0">
+              <a:rPr sz="1250" b="1" i="0">
                 <a:solidFill>
-                  <a:srgbClr val="2B3232"/>
+                  <a:srgbClr val="17123A"/>
+                </a:solidFill>
+                <a:latin typeface="Georgia"/>
+              </a:rPr>
+              <a:t>R$ 150–300 mil/ano</a:t>
+            </a:r>
+          </a:p>
+        </p:txBody>
+      </p:sp>
+      <p:sp>
+        <p:nvSpPr>
+          <p:cNvPr id="15" name="TextBox 14"/>
+          <p:cNvSpPr txBox="1"/>
+          <p:nvPr/>
+        </p:nvSpPr>
+        <p:spPr>
+          <a:xfrm>
+            <a:off x="768096" y="4882896"/>
+            <a:ext cx="1740407" cy="237744"/>
+          </a:xfrm>
+          <a:prstGeom prst="rect">
+            <a:avLst/>
+          </a:prstGeom>
+          <a:noFill/>
+        </p:spPr>
+        <p:txBody>
+          <a:bodyPr wrap="square" lIns="0" rIns="0" tIns="0" bIns="0" anchor="t">
+            <a:spAutoFit/>
+          </a:bodyPr>
+          <a:lstStyle/>
+          <a:p>
+            <a:pPr algn="l">
+              <a:lnSpc>
+                <a:spcPct val="100000"/>
+              </a:lnSpc>
+              <a:spcBef>
+                <a:spcPts val="0"/>
+              </a:spcBef>
+              <a:spcAft>
+                <a:spcPts val="0"/>
+              </a:spcAft>
+            </a:pPr>
+            <a:r>
+              <a:rPr sz="730" b="0" i="0">
+                <a:solidFill>
+                  <a:srgbClr val="5B6B7F"/>
                 </a:solidFill>
                 <a:latin typeface="Calibri"/>
               </a:rPr>
-              <a:t>Receita nova sobre uma estrutura que já existe e já custa — a licença já pagou a barreira de capital.</a:t>
-            </a:r>
-          </a:p>
-        </p:txBody>
-      </p:sp>
-      <p:sp>
-        <p:nvSpPr>
-          <p:cNvPr id="14" name="Oval 13"/>
+              <a:t>custo fixo típico do fundo hoje</a:t>
+            </a:r>
+          </a:p>
+        </p:txBody>
+      </p:sp>
+      <p:sp>
+        <p:nvSpPr>
+          <p:cNvPr id="16" name="Rounded Rectangle 15"/>
           <p:cNvSpPr/>
           <p:nvPr/>
         </p:nvSpPr>
         <p:spPr>
           <a:xfrm>
-            <a:off x="649224" y="4919472"/>
-            <a:ext cx="73152" cy="73152"/>
-          </a:xfrm>
-          <a:prstGeom prst="ellipse">
-            <a:avLst/>
+            <a:off x="2782823" y="4517136"/>
+            <a:ext cx="1996439" cy="621792"/>
+          </a:xfrm>
+          <a:prstGeom prst="roundRect">
+            <a:avLst>
+              <a:gd name="adj" fmla="val 9000"/>
+            </a:avLst>
           </a:prstGeom>
           <a:solidFill>
-            <a:srgbClr val="1FC0EF"/>
+            <a:srgbClr val="F4F5FB"/>
           </a:solidFill>
-          <a:ln>
-            <a:noFill/>
+          <a:ln w="9525">
+            <a:solidFill>
+              <a:srgbClr val="E7E8F2"/>
+            </a:solidFill>
           </a:ln>
           <a:effectLst/>
         </p:spPr>
@@ -3642,14 +3740,14 @@
       </p:sp>
       <p:sp>
         <p:nvSpPr>
-          <p:cNvPr id="15" name="TextBox 14"/>
+          <p:cNvPr id="17" name="TextBox 16"/>
           <p:cNvSpPr txBox="1"/>
           <p:nvPr/>
         </p:nvSpPr>
         <p:spPr>
           <a:xfrm>
-            <a:off x="841247" y="4873752"/>
-            <a:ext cx="6080759" cy="475488"/>
+            <a:off x="2910840" y="4590288"/>
+            <a:ext cx="1740407" cy="274320"/>
           </a:xfrm>
           <a:prstGeom prst="rect">
             <a:avLst/>
@@ -3664,7 +3762,7 @@
           <a:p>
             <a:pPr algn="l">
               <a:lnSpc>
-                <a:spcPct val="114000"/>
+                <a:spcPct val="100000"/>
               </a:lnSpc>
               <a:spcBef>
                 <a:spcPts val="0"/>
@@ -3674,36 +3772,85 @@
               </a:spcAft>
             </a:pPr>
             <a:r>
-              <a:rPr sz="1050" b="0" i="0">
+              <a:rPr sz="1250" b="1" i="0">
                 <a:solidFill>
-                  <a:srgbClr val="2B3232"/>
+                  <a:srgbClr val="17123A"/>
+                </a:solidFill>
+                <a:latin typeface="Georgia"/>
+              </a:rPr>
+              <a:t>≈ R$ 20 milhões</a:t>
+            </a:r>
+          </a:p>
+        </p:txBody>
+      </p:sp>
+      <p:sp>
+        <p:nvSpPr>
+          <p:cNvPr id="18" name="TextBox 17"/>
+          <p:cNvSpPr txBox="1"/>
+          <p:nvPr/>
+        </p:nvSpPr>
+        <p:spPr>
+          <a:xfrm>
+            <a:off x="2910840" y="4882896"/>
+            <a:ext cx="1740407" cy="237744"/>
+          </a:xfrm>
+          <a:prstGeom prst="rect">
+            <a:avLst/>
+          </a:prstGeom>
+          <a:noFill/>
+        </p:spPr>
+        <p:txBody>
+          <a:bodyPr wrap="square" lIns="0" rIns="0" tIns="0" bIns="0" anchor="t">
+            <a:spAutoFit/>
+          </a:bodyPr>
+          <a:lstStyle/>
+          <a:p>
+            <a:pPr algn="l">
+              <a:lnSpc>
+                <a:spcPct val="100000"/>
+              </a:lnSpc>
+              <a:spcBef>
+                <a:spcPts val="0"/>
+              </a:spcBef>
+              <a:spcAft>
+                <a:spcPts val="0"/>
+              </a:spcAft>
+            </a:pPr>
+            <a:r>
+              <a:rPr sz="730" b="0" i="0">
+                <a:solidFill>
+                  <a:srgbClr val="5B6B7F"/>
                 </a:solidFill>
                 <a:latin typeface="Calibri"/>
               </a:rPr>
-              <a:t>Custo de entrada ~zero: sem investir em tecnologia nem contratar equipe.</a:t>
-            </a:r>
-          </a:p>
-        </p:txBody>
-      </p:sp>
-      <p:sp>
-        <p:nvSpPr>
-          <p:cNvPr id="16" name="Oval 15"/>
+              <a:t>PL mínimo p/ fechar a conta hoje</a:t>
+            </a:r>
+          </a:p>
+        </p:txBody>
+      </p:sp>
+      <p:sp>
+        <p:nvSpPr>
+          <p:cNvPr id="19" name="Rounded Rectangle 18"/>
           <p:cNvSpPr/>
           <p:nvPr/>
         </p:nvSpPr>
         <p:spPr>
           <a:xfrm>
-            <a:off x="649224" y="5394960"/>
-            <a:ext cx="73152" cy="73152"/>
-          </a:xfrm>
-          <a:prstGeom prst="ellipse">
-            <a:avLst/>
+            <a:off x="4925568" y="4517136"/>
+            <a:ext cx="1996439" cy="621792"/>
+          </a:xfrm>
+          <a:prstGeom prst="roundRect">
+            <a:avLst>
+              <a:gd name="adj" fmla="val 9000"/>
+            </a:avLst>
           </a:prstGeom>
           <a:solidFill>
-            <a:srgbClr val="1FC0EF"/>
+            <a:srgbClr val="F4F5FB"/>
           </a:solidFill>
-          <a:ln>
-            <a:noFill/>
+          <a:ln w="9525">
+            <a:solidFill>
+              <a:srgbClr val="E7E8F2"/>
+            </a:solidFill>
           </a:ln>
           <a:effectLst/>
         </p:spPr>
@@ -3731,196 +3878,14 @@
       </p:sp>
       <p:sp>
         <p:nvSpPr>
-          <p:cNvPr id="17" name="TextBox 16"/>
+          <p:cNvPr id="20" name="TextBox 19"/>
           <p:cNvSpPr txBox="1"/>
           <p:nvPr/>
         </p:nvSpPr>
         <p:spPr>
           <a:xfrm>
-            <a:off x="841247" y="5349240"/>
-            <a:ext cx="6080759" cy="475488"/>
-          </a:xfrm>
-          <a:prstGeom prst="rect">
-            <a:avLst/>
-          </a:prstGeom>
-          <a:noFill/>
-        </p:spPr>
-        <p:txBody>
-          <a:bodyPr wrap="square" lIns="0" rIns="0" tIns="0" bIns="0" anchor="t">
-            <a:spAutoFit/>
-          </a:bodyPr>
-          <a:lstStyle/>
-          <a:p>
-            <a:pPr algn="l">
-              <a:lnSpc>
-                <a:spcPct val="114000"/>
-              </a:lnSpc>
-              <a:spcBef>
-                <a:spcPts val="0"/>
-              </a:spcBef>
-              <a:spcAft>
-                <a:spcPts val="0"/>
-              </a:spcAft>
-            </a:pPr>
-            <a:r>
-              <a:rPr sz="1050" b="0" i="0">
-                <a:solidFill>
-                  <a:srgbClr val="2B3232"/>
-                </a:solidFill>
-                <a:latin typeface="Calibri"/>
-              </a:rPr>
-              <a:t>Custódia própria opcional na fase 2 — mais uma linha de receita sobre a mesma máquina.</a:t>
-            </a:r>
-          </a:p>
-        </p:txBody>
-      </p:sp>
-      <p:sp>
-        <p:nvSpPr>
-          <p:cNvPr id="18" name="Oval 17"/>
-          <p:cNvSpPr/>
-          <p:nvPr/>
-        </p:nvSpPr>
-        <p:spPr>
-          <a:xfrm>
-            <a:off x="649224" y="5870448"/>
-            <a:ext cx="73152" cy="73152"/>
-          </a:xfrm>
-          <a:prstGeom prst="ellipse">
-            <a:avLst/>
-          </a:prstGeom>
-          <a:solidFill>
-            <a:srgbClr val="1FC0EF"/>
-          </a:solidFill>
-          <a:ln>
-            <a:noFill/>
-          </a:ln>
-          <a:effectLst/>
-        </p:spPr>
-        <p:style>
-          <a:lnRef idx="1">
-            <a:schemeClr val="accent1"/>
-          </a:lnRef>
-          <a:fillRef idx="3">
-            <a:schemeClr val="accent1"/>
-          </a:fillRef>
-          <a:effectRef idx="2">
-            <a:schemeClr val="accent1"/>
-          </a:effectRef>
-          <a:fontRef idx="minor">
-            <a:schemeClr val="lt1"/>
-          </a:fontRef>
-        </p:style>
-        <p:txBody>
-          <a:bodyPr rtlCol="0" anchor="ctr"/>
-          <a:lstStyle/>
-          <a:p>
-            <a:pPr algn="ctr"/>
-          </a:p>
-        </p:txBody>
-      </p:sp>
-      <p:sp>
-        <p:nvSpPr>
-          <p:cNvPr id="19" name="TextBox 18"/>
-          <p:cNvSpPr txBox="1"/>
-          <p:nvPr/>
-        </p:nvSpPr>
-        <p:spPr>
-          <a:xfrm>
-            <a:off x="841247" y="5824728"/>
-            <a:ext cx="6080759" cy="475488"/>
-          </a:xfrm>
-          <a:prstGeom prst="rect">
-            <a:avLst/>
-          </a:prstGeom>
-          <a:noFill/>
-        </p:spPr>
-        <p:txBody>
-          <a:bodyPr wrap="square" lIns="0" rIns="0" tIns="0" bIns="0" anchor="t">
-            <a:spAutoFit/>
-          </a:bodyPr>
-          <a:lstStyle/>
-          <a:p>
-            <a:pPr algn="l">
-              <a:lnSpc>
-                <a:spcPct val="114000"/>
-              </a:lnSpc>
-              <a:spcBef>
-                <a:spcPts val="0"/>
-              </a:spcBef>
-              <a:spcAft>
-                <a:spcPts val="0"/>
-              </a:spcAft>
-            </a:pPr>
-            <a:r>
-              <a:rPr sz="1050" b="0" i="0">
-                <a:solidFill>
-                  <a:srgbClr val="2B3232"/>
-                </a:solidFill>
-                <a:latin typeface="Calibri"/>
-              </a:rPr>
-              <a:t>Risco reduzido, não aumentado: operação documentada, monitoramento diário em 100% dos fundos, trilha de auditoria completa.</a:t>
-            </a:r>
-          </a:p>
-        </p:txBody>
-      </p:sp>
-      <p:sp>
-        <p:nvSpPr>
-          <p:cNvPr id="20" name="Rounded Rectangle 19"/>
-          <p:cNvSpPr/>
-          <p:nvPr/>
-        </p:nvSpPr>
-        <p:spPr>
-          <a:xfrm>
-            <a:off x="640080" y="6464808"/>
-            <a:ext cx="6281927" cy="841248"/>
-          </a:xfrm>
-          <a:prstGeom prst="roundRect">
-            <a:avLst>
-              <a:gd name="adj" fmla="val 5000"/>
-            </a:avLst>
-          </a:prstGeom>
-          <a:solidFill>
-            <a:srgbClr val="F4F5FB"/>
-          </a:solidFill>
-          <a:ln w="9525">
-            <a:solidFill>
-              <a:srgbClr val="E7E8F2"/>
-            </a:solidFill>
-          </a:ln>
-          <a:effectLst/>
-        </p:spPr>
-        <p:style>
-          <a:lnRef idx="1">
-            <a:schemeClr val="accent1"/>
-          </a:lnRef>
-          <a:fillRef idx="3">
-            <a:schemeClr val="accent1"/>
-          </a:fillRef>
-          <a:effectRef idx="2">
-            <a:schemeClr val="accent1"/>
-          </a:effectRef>
-          <a:fontRef idx="minor">
-            <a:schemeClr val="lt1"/>
-          </a:fontRef>
-        </p:style>
-        <p:txBody>
-          <a:bodyPr rtlCol="0" anchor="ctr"/>
-          <a:lstStyle/>
-          <a:p>
-            <a:pPr algn="ctr"/>
-          </a:p>
-        </p:txBody>
-      </p:sp>
-      <p:sp>
-        <p:nvSpPr>
-          <p:cNvPr id="21" name="TextBox 20"/>
-          <p:cNvSpPr txBox="1"/>
-          <p:nvPr/>
-        </p:nvSpPr>
-        <p:spPr>
-          <a:xfrm>
-            <a:off x="896112" y="6611112"/>
-            <a:ext cx="2194560" cy="274320"/>
+            <a:off x="5053584" y="4590288"/>
+            <a:ext cx="1740407" cy="274320"/>
           </a:xfrm>
           <a:prstGeom prst="rect">
             <a:avLst/>
@@ -3945,27 +3910,27 @@
               </a:spcAft>
             </a:pPr>
             <a:r>
-              <a:rPr sz="800" b="1" i="0" spc="120">
+              <a:rPr sz="1250" b="1" i="0">
                 <a:solidFill>
-                  <a:srgbClr val="6A50AC"/>
+                  <a:srgbClr val="17123A"/>
                 </a:solidFill>
-                <a:latin typeface="Consolas"/>
+                <a:latin typeface="Georgia"/>
               </a:rPr>
-              <a:t>SEU PONTO DE PARTIDA</a:t>
-            </a:r>
-          </a:p>
-        </p:txBody>
-      </p:sp>
-      <p:sp>
-        <p:nvSpPr>
-          <p:cNvPr id="22" name="TextBox 21"/>
+              <a:t>R$ 1 milhão</a:t>
+            </a:r>
+          </a:p>
+        </p:txBody>
+      </p:sp>
+      <p:sp>
+        <p:nvSpPr>
+          <p:cNvPr id="21" name="TextBox 20"/>
           <p:cNvSpPr txBox="1"/>
           <p:nvPr/>
         </p:nvSpPr>
         <p:spPr>
           <a:xfrm>
-            <a:off x="896112" y="6830568"/>
-            <a:ext cx="5769863" cy="457200"/>
+            <a:off x="5053584" y="4882896"/>
+            <a:ext cx="1740407" cy="237744"/>
           </a:xfrm>
           <a:prstGeom prst="rect">
             <a:avLst/>
@@ -3980,7 +3945,7 @@
           <a:p>
             <a:pPr algn="l">
               <a:lnSpc>
-                <a:spcPct val="116000"/>
+                <a:spcPct val="100000"/>
               </a:lnSpc>
               <a:spcBef>
                 <a:spcPts val="0"/>
@@ -3990,26 +3955,26 @@
               </a:spcAft>
             </a:pPr>
             <a:r>
-              <a:rPr sz="1000" b="0" i="0">
+              <a:rPr sz="730" b="0" i="0">
                 <a:solidFill>
-                  <a:srgbClr val="2B3232"/>
+                  <a:srgbClr val="5B6B7F"/>
                 </a:solidFill>
                 <a:latin typeface="Calibri"/>
               </a:rPr>
-              <a:t>Vocês já são elegíveis (Res. CVM 21). Falta só o credenciamento de administrador fiduciário — prazo legal de 60 dias, com o dossiê que entregamos pronto para protocolar.</a:t>
+              <a:t>PL viável na estrutura Argus</a:t>
             </a:r>
           </a:p>
         </p:txBody>
       </p:sp>
       <p:cxnSp>
         <p:nvCxnSpPr>
-          <p:cNvPr id="23" name="Connector 22"/>
+          <p:cNvPr id="22" name="Connector 21"/>
           <p:cNvCxnSpPr/>
           <p:nvPr/>
         </p:nvCxnSpPr>
         <p:spPr>
           <a:xfrm>
-            <a:off x="640080" y="7589520"/>
+            <a:off x="640080" y="5431536"/>
             <a:ext cx="219456" cy="0"/>
           </a:xfrm>
           <a:prstGeom prst="line">
@@ -4039,14 +4004,14 @@
       </p:cxnSp>
       <p:sp>
         <p:nvSpPr>
-          <p:cNvPr id="24" name="TextBox 23"/>
+          <p:cNvPr id="23" name="TextBox 22"/>
           <p:cNvSpPr txBox="1"/>
           <p:nvPr/>
         </p:nvSpPr>
         <p:spPr>
           <a:xfrm>
-            <a:off x="950976" y="7516368"/>
-            <a:ext cx="5486400" cy="228600"/>
+            <a:off x="950976" y="5358384"/>
+            <a:ext cx="6035040" cy="228600"/>
           </a:xfrm>
           <a:prstGeom prst="rect">
             <a:avLst/>
@@ -4077,74 +4042,27 @@
                 </a:solidFill>
                 <a:latin typeface="Consolas"/>
               </a:rPr>
-              <a:t>A PROVA — NÃO É IDEIA EM GUARDANAPO</a:t>
-            </a:r>
-          </a:p>
-        </p:txBody>
-      </p:sp>
-      <p:sp>
-        <p:nvSpPr>
-          <p:cNvPr id="25" name="TextBox 24"/>
-          <p:cNvSpPr txBox="1"/>
+              <a:t>DE ONDE VEM O BARATEAMENTO — TRÊS ALAVANCAS</a:t>
+            </a:r>
+          </a:p>
+        </p:txBody>
+      </p:sp>
+      <p:sp>
+        <p:nvSpPr>
+          <p:cNvPr id="24" name="Oval 23"/>
+          <p:cNvSpPr/>
           <p:nvPr/>
         </p:nvSpPr>
         <p:spPr>
           <a:xfrm>
-            <a:off x="640080" y="7827264"/>
-            <a:ext cx="6281927" cy="822960"/>
-          </a:xfrm>
-          <a:prstGeom prst="rect">
+            <a:off x="649224" y="5678424"/>
+            <a:ext cx="73152" cy="73152"/>
+          </a:xfrm>
+          <a:prstGeom prst="ellipse">
             <a:avLst/>
           </a:prstGeom>
-          <a:noFill/>
-        </p:spPr>
-        <p:txBody>
-          <a:bodyPr wrap="square" lIns="0" rIns="0" tIns="0" bIns="0" anchor="t">
-            <a:spAutoFit/>
-          </a:bodyPr>
-          <a:lstStyle/>
-          <a:p>
-            <a:pPr algn="l">
-              <a:lnSpc>
-                <a:spcPct val="122000"/>
-              </a:lnSpc>
-              <a:spcBef>
-                <a:spcPts val="0"/>
-              </a:spcBef>
-              <a:spcAft>
-                <a:spcPts val="0"/>
-              </a:spcAft>
-            </a:pPr>
-            <a:r>
-              <a:rPr sz="1050" b="0" i="0">
-                <a:solidFill>
-                  <a:srgbClr val="2B3232"/>
-                </a:solidFill>
-                <a:latin typeface="Calibri"/>
-              </a:rPr>
-              <a:t>Protótipo operacional de ponta a ponta no ar (argusdtvm.com.br, dados simulados) — do checklist de abertura ao informe diário à CVM. Dossiês de credenciamento prontos para protocolar: administração fiduciária (prazo legal de 60 dias) e custódia (90 dias), com manuais e matrizes de conformidade.</a:t>
-            </a:r>
-          </a:p>
-        </p:txBody>
-      </p:sp>
-      <p:sp>
-        <p:nvSpPr>
-          <p:cNvPr id="26" name="Rounded Rectangle 25"/>
-          <p:cNvSpPr/>
-          <p:nvPr/>
-        </p:nvSpPr>
-        <p:spPr>
-          <a:xfrm>
-            <a:off x="640080" y="8723376"/>
-            <a:ext cx="6281927" cy="868680"/>
-          </a:xfrm>
-          <a:prstGeom prst="roundRect">
-            <a:avLst>
-              <a:gd name="adj" fmla="val 5000"/>
-            </a:avLst>
-          </a:prstGeom>
           <a:solidFill>
-            <a:srgbClr val="6A50AC"/>
+            <a:srgbClr val="1FC0EF"/>
           </a:solidFill>
           <a:ln>
             <a:noFill/>
@@ -4175,14 +4093,14 @@
       </p:sp>
       <p:sp>
         <p:nvSpPr>
-          <p:cNvPr id="27" name="TextBox 26"/>
+          <p:cNvPr id="25" name="TextBox 24"/>
           <p:cNvSpPr txBox="1"/>
           <p:nvPr/>
         </p:nvSpPr>
         <p:spPr>
           <a:xfrm>
-            <a:off x="914400" y="8869680"/>
-            <a:ext cx="3291840" cy="365760"/>
+            <a:off x="822959" y="5632704"/>
+            <a:ext cx="6099047" cy="182880"/>
           </a:xfrm>
           <a:prstGeom prst="rect">
             <a:avLst/>
@@ -4207,27 +4125,27 @@
               </a:spcAft>
             </a:pPr>
             <a:r>
-              <a:rPr sz="1500" b="1" i="0">
+              <a:rPr sz="980" b="1" i="0">
                 <a:solidFill>
-                  <a:srgbClr val="F3F6FA"/>
+                  <a:srgbClr val="17123A"/>
                 </a:solidFill>
-                <a:latin typeface="Georgia"/>
+                <a:latin typeface="Calibri"/>
               </a:rPr>
-              <a:t>0,08% a.a. + R$ 100/mês</a:t>
-            </a:r>
-          </a:p>
-        </p:txBody>
-      </p:sp>
-      <p:sp>
-        <p:nvSpPr>
-          <p:cNvPr id="28" name="TextBox 27"/>
+              <a:t>Custódia dentro de casa — o banco como agente custodiante.</a:t>
+            </a:r>
+          </a:p>
+        </p:txBody>
+      </p:sp>
+      <p:sp>
+        <p:nvSpPr>
+          <p:cNvPr id="26" name="TextBox 25"/>
           <p:cNvSpPr txBox="1"/>
           <p:nvPr/>
         </p:nvSpPr>
         <p:spPr>
           <a:xfrm>
-            <a:off x="914400" y="9235440"/>
-            <a:ext cx="3840480" cy="274320"/>
+            <a:off x="822959" y="5815584"/>
+            <a:ext cx="6099047" cy="457200"/>
           </a:xfrm>
           <a:prstGeom prst="rect">
             <a:avLst/>
@@ -4242,7 +4160,7 @@
           <a:p>
             <a:pPr algn="l">
               <a:lnSpc>
-                <a:spcPct val="100000"/>
+                <a:spcPct val="108000"/>
               </a:lnSpc>
               <a:spcBef>
                 <a:spcPts val="0"/>
@@ -4252,129 +4170,36 @@
               </a:spcAft>
             </a:pPr>
             <a:r>
-              <a:rPr sz="850" b="0" i="0">
+              <a:rPr sz="900" b="0" i="0">
                 <a:solidFill>
-                  <a:srgbClr val="A8B6C6"/>
+                  <a:srgbClr val="2B3232"/>
                 </a:solidFill>
                 <a:latin typeface="Calibri"/>
               </a:rPr>
-              <a:t>4–5× mais barato — competitivo a partir de R$ 2 milhões de PL</a:t>
-            </a:r>
-          </a:p>
-        </p:txBody>
-      </p:sp>
-      <p:sp>
-        <p:nvSpPr>
-          <p:cNvPr id="29" name="TextBox 28"/>
-          <p:cNvSpPr txBox="1"/>
+              <a:t>Em vez de pagar custódia de terceiro — que sozinha já carrega piso de mercado —, a parceria credencia a custódia no próprio banco (Res. CVM 32): o custo sai da conta do fundo e vira receita interna da instituição. É a verticalização que os grandes praticam, aplicada pela primeira vez ao fundo pequeno.</a:t>
+            </a:r>
+          </a:p>
+        </p:txBody>
+      </p:sp>
+      <p:sp>
+        <p:nvSpPr>
+          <p:cNvPr id="27" name="Oval 26"/>
+          <p:cNvSpPr/>
           <p:nvPr/>
         </p:nvSpPr>
         <p:spPr>
           <a:xfrm>
-            <a:off x="4453127" y="8869680"/>
-            <a:ext cx="2194560" cy="640080"/>
-          </a:xfrm>
-          <a:prstGeom prst="rect">
+            <a:off x="649224" y="6391656"/>
+            <a:ext cx="73152" cy="73152"/>
+          </a:xfrm>
+          <a:prstGeom prst="ellipse">
             <a:avLst/>
           </a:prstGeom>
-          <a:noFill/>
-        </p:spPr>
-        <p:txBody>
-          <a:bodyPr wrap="square" lIns="0" rIns="0" tIns="0" bIns="0" anchor="t">
-            <a:spAutoFit/>
-          </a:bodyPr>
-          <a:lstStyle/>
-          <a:p>
-            <a:pPr algn="r">
-              <a:lnSpc>
-                <a:spcPct val="112000"/>
-              </a:lnSpc>
-              <a:spcBef>
-                <a:spcPts val="0"/>
-              </a:spcBef>
-              <a:spcAft>
-                <a:spcPts val="0"/>
-              </a:spcAft>
-            </a:pPr>
-            <a:r>
-              <a:rPr sz="850" b="0" i="0" spc="20">
-                <a:solidFill>
-                  <a:srgbClr val="CFEEFB"/>
-                </a:solidFill>
-                <a:latin typeface="Consolas"/>
-              </a:rPr>
-              <a:t>Só 1.277 dos ~31 mil</a:t>
-            </a:r>
-          </a:p>
-          <a:p>
-            <a:pPr algn="r">
-              <a:lnSpc>
-                <a:spcPct val="112000"/>
-              </a:lnSpc>
-              <a:spcBef>
-                <a:spcPts val="0"/>
-              </a:spcBef>
-              <a:spcAft>
-                <a:spcPts val="0"/>
-              </a:spcAft>
-            </a:pPr>
-            <a:r>
-              <a:rPr sz="850" b="0" i="0" spc="20">
-                <a:solidFill>
-                  <a:srgbClr val="CFEEFB"/>
-                </a:solidFill>
-                <a:latin typeface="Consolas"/>
-              </a:rPr>
-              <a:t>fundos passam de R$ 1 bi.</a:t>
-            </a:r>
-          </a:p>
-          <a:p>
-            <a:pPr algn="r">
-              <a:lnSpc>
-                <a:spcPct val="112000"/>
-              </a:lnSpc>
-              <a:spcBef>
-                <a:spcPts val="0"/>
-              </a:spcBef>
-              <a:spcAft>
-                <a:spcPts val="0"/>
-              </a:spcAft>
-            </a:pPr>
-            <a:r>
-              <a:rPr sz="850" b="0" i="0" spc="20">
-                <a:solidFill>
-                  <a:srgbClr val="CFEEFB"/>
-                </a:solidFill>
-                <a:latin typeface="Consolas"/>
-              </a:rPr>
-              <a:t>A cauda pequena é enorme.</a:t>
-            </a:r>
-          </a:p>
-        </p:txBody>
-      </p:sp>
-      <p:sp>
-        <p:nvSpPr>
-          <p:cNvPr id="30" name="Rounded Rectangle 29"/>
-          <p:cNvSpPr/>
-          <p:nvPr/>
-        </p:nvSpPr>
-        <p:spPr>
-          <a:xfrm>
-            <a:off x="640080" y="9656064"/>
-            <a:ext cx="6281927" cy="512064"/>
-          </a:xfrm>
-          <a:prstGeom prst="roundRect">
-            <a:avLst>
-              <a:gd name="adj" fmla="val 12000"/>
-            </a:avLst>
-          </a:prstGeom>
           <a:solidFill>
-            <a:srgbClr val="F4F5FB"/>
+            <a:srgbClr val="1FC0EF"/>
           </a:solidFill>
-          <a:ln w="12700">
-            <a:solidFill>
-              <a:srgbClr val="1FC0EF"/>
-            </a:solidFill>
+          <a:ln>
+            <a:noFill/>
           </a:ln>
           <a:effectLst/>
         </p:spPr>
@@ -4402,14 +4227,14 @@
       </p:sp>
       <p:sp>
         <p:nvSpPr>
-          <p:cNvPr id="31" name="TextBox 30"/>
+          <p:cNvPr id="28" name="TextBox 27"/>
           <p:cNvSpPr txBox="1"/>
           <p:nvPr/>
         </p:nvSpPr>
         <p:spPr>
           <a:xfrm>
-            <a:off x="896112" y="9756648"/>
-            <a:ext cx="5769863" cy="329184"/>
+            <a:off x="822959" y="6345936"/>
+            <a:ext cx="6099047" cy="182880"/>
           </a:xfrm>
           <a:prstGeom prst="rect">
             <a:avLst/>
@@ -4424,7 +4249,7 @@
           <a:p>
             <a:pPr algn="l">
               <a:lnSpc>
-                <a:spcPct val="112000"/>
+                <a:spcPct val="100000"/>
               </a:lnSpc>
               <a:spcBef>
                 <a:spcPts val="0"/>
@@ -4434,34 +4259,438 @@
               </a:spcAft>
             </a:pPr>
             <a:r>
-              <a:rPr sz="1050" b="0" i="1">
+              <a:rPr sz="980" b="1" i="0">
+                <a:solidFill>
+                  <a:srgbClr val="17123A"/>
+                </a:solidFill>
+                <a:latin typeface="Calibri"/>
+              </a:rPr>
+              <a:t>Operação automatizada com IA — custo marginal por fundo perto de zero.</a:t>
+            </a:r>
+          </a:p>
+        </p:txBody>
+      </p:sp>
+      <p:sp>
+        <p:nvSpPr>
+          <p:cNvPr id="29" name="TextBox 28"/>
+          <p:cNvSpPr txBox="1"/>
+          <p:nvPr/>
+        </p:nvSpPr>
+        <p:spPr>
+          <a:xfrm>
+            <a:off x="822959" y="6528816"/>
+            <a:ext cx="6099047" cy="457200"/>
+          </a:xfrm>
+          <a:prstGeom prst="rect">
+            <a:avLst/>
+          </a:prstGeom>
+          <a:noFill/>
+        </p:spPr>
+        <p:txBody>
+          <a:bodyPr wrap="square" lIns="0" rIns="0" tIns="0" bIns="0" anchor="t">
+            <a:spAutoFit/>
+          </a:bodyPr>
+          <a:lstStyle/>
+          <a:p>
+            <a:pPr algn="l">
+              <a:lnSpc>
+                <a:spcPct val="108000"/>
+              </a:lnSpc>
+              <a:spcBef>
+                <a:spcPts val="0"/>
+              </a:spcBef>
+              <a:spcAft>
+                <a:spcPts val="0"/>
+              </a:spcAft>
+            </a:pPr>
+            <a:r>
+              <a:rPr sz="900" b="0" i="0">
                 <a:solidFill>
                   <a:srgbClr val="2B3232"/>
                 </a:solidFill>
+                <a:latin typeface="Calibri"/>
+              </a:rPr>
+              <a:t>Cota diária, conciliação, enquadramento, tributação, reporte CVM/ANBIMA e a geração dos documentos de constituição rodam automatizados; a IA assume a conferência e as exceções que hoje ocupam equipes inteiras. Administrar o fundo nº 100 custa quase o mesmo que o nº 10.</a:t>
+            </a:r>
+          </a:p>
+        </p:txBody>
+      </p:sp>
+      <p:sp>
+        <p:nvSpPr>
+          <p:cNvPr id="30" name="Oval 29"/>
+          <p:cNvSpPr/>
+          <p:nvPr/>
+        </p:nvSpPr>
+        <p:spPr>
+          <a:xfrm>
+            <a:off x="649224" y="7104888"/>
+            <a:ext cx="73152" cy="73152"/>
+          </a:xfrm>
+          <a:prstGeom prst="ellipse">
+            <a:avLst/>
+          </a:prstGeom>
+          <a:solidFill>
+            <a:srgbClr val="1FC0EF"/>
+          </a:solidFill>
+          <a:ln>
+            <a:noFill/>
+          </a:ln>
+          <a:effectLst/>
+        </p:spPr>
+        <p:style>
+          <a:lnRef idx="1">
+            <a:schemeClr val="accent1"/>
+          </a:lnRef>
+          <a:fillRef idx="3">
+            <a:schemeClr val="accent1"/>
+          </a:fillRef>
+          <a:effectRef idx="2">
+            <a:schemeClr val="accent1"/>
+          </a:effectRef>
+          <a:fontRef idx="minor">
+            <a:schemeClr val="lt1"/>
+          </a:fontRef>
+        </p:style>
+        <p:txBody>
+          <a:bodyPr rtlCol="0" anchor="ctr"/>
+          <a:lstStyle/>
+          <a:p>
+            <a:pPr algn="ctr"/>
+          </a:p>
+        </p:txBody>
+      </p:sp>
+      <p:sp>
+        <p:nvSpPr>
+          <p:cNvPr id="31" name="TextBox 30"/>
+          <p:cNvSpPr txBox="1"/>
+          <p:nvPr/>
+        </p:nvSpPr>
+        <p:spPr>
+          <a:xfrm>
+            <a:off x="822959" y="7059168"/>
+            <a:ext cx="6099047" cy="182880"/>
+          </a:xfrm>
+          <a:prstGeom prst="rect">
+            <a:avLst/>
+          </a:prstGeom>
+          <a:noFill/>
+        </p:spPr>
+        <p:txBody>
+          <a:bodyPr wrap="square" lIns="0" rIns="0" tIns="0" bIns="0" anchor="t">
+            <a:spAutoFit/>
+          </a:bodyPr>
+          <a:lstStyle/>
+          <a:p>
+            <a:pPr algn="l">
+              <a:lnSpc>
+                <a:spcPct val="100000"/>
+              </a:lnSpc>
+              <a:spcBef>
+                <a:spcPts val="0"/>
+              </a:spcBef>
+              <a:spcAft>
+                <a:spcPts val="0"/>
+              </a:spcAft>
+            </a:pPr>
+            <a:r>
+              <a:rPr sz="980" b="1" i="0">
+                <a:solidFill>
+                  <a:srgbClr val="17123A"/>
+                </a:solidFill>
+                <a:latin typeface="Calibri"/>
+              </a:rPr>
+              <a:t>Verificação antilavagem com IA — vigilância diária de 100% dos fundos.</a:t>
+            </a:r>
+          </a:p>
+        </p:txBody>
+      </p:sp>
+      <p:sp>
+        <p:nvSpPr>
+          <p:cNvPr id="32" name="TextBox 31"/>
+          <p:cNvSpPr txBox="1"/>
+          <p:nvPr/>
+        </p:nvSpPr>
+        <p:spPr>
+          <a:xfrm>
+            <a:off x="822959" y="7242048"/>
+            <a:ext cx="6099047" cy="457200"/>
+          </a:xfrm>
+          <a:prstGeom prst="rect">
+            <a:avLst/>
+          </a:prstGeom>
+          <a:noFill/>
+        </p:spPr>
+        <p:txBody>
+          <a:bodyPr wrap="square" lIns="0" rIns="0" tIns="0" bIns="0" anchor="t">
+            <a:spAutoFit/>
+          </a:bodyPr>
+          <a:lstStyle/>
+          <a:p>
+            <a:pPr algn="l">
+              <a:lnSpc>
+                <a:spcPct val="108000"/>
+              </a:lnSpc>
+              <a:spcBef>
+                <a:spcPts val="0"/>
+              </a:spcBef>
+              <a:spcAft>
+                <a:spcPts val="0"/>
+              </a:spcAft>
+            </a:pPr>
+            <a:r>
+              <a:rPr sz="900" b="0" i="0">
+                <a:solidFill>
+                  <a:srgbClr val="2B3232"/>
+                </a:solidFill>
+                <a:latin typeface="Calibri"/>
+              </a:rPr>
+              <a:t>O motor roda regras de preço fora de mercado, partes relacionadas, lastro em custódia e movimentação atípica todos os dias, com evidência e trilha. O compliance que nas casas tradicionais é custo fixo de gente vira software — mais barato e MAIS rigoroso que o padrão de mercado.</a:t>
+            </a:r>
+          </a:p>
+        </p:txBody>
+      </p:sp>
+      <p:sp>
+        <p:nvSpPr>
+          <p:cNvPr id="33" name="Rounded Rectangle 32"/>
+          <p:cNvSpPr/>
+          <p:nvPr/>
+        </p:nvSpPr>
+        <p:spPr>
+          <a:xfrm>
+            <a:off x="640080" y="7772400"/>
+            <a:ext cx="6281927" cy="786384"/>
+          </a:xfrm>
+          <a:prstGeom prst="roundRect">
+            <a:avLst>
+              <a:gd name="adj" fmla="val 5000"/>
+            </a:avLst>
+          </a:prstGeom>
+          <a:solidFill>
+            <a:srgbClr val="6A50AC"/>
+          </a:solidFill>
+          <a:ln>
+            <a:noFill/>
+          </a:ln>
+          <a:effectLst/>
+        </p:spPr>
+        <p:style>
+          <a:lnRef idx="1">
+            <a:schemeClr val="accent1"/>
+          </a:lnRef>
+          <a:fillRef idx="3">
+            <a:schemeClr val="accent1"/>
+          </a:fillRef>
+          <a:effectRef idx="2">
+            <a:schemeClr val="accent1"/>
+          </a:effectRef>
+          <a:fontRef idx="minor">
+            <a:schemeClr val="lt1"/>
+          </a:fontRef>
+        </p:style>
+        <p:txBody>
+          <a:bodyPr rtlCol="0" anchor="ctr"/>
+          <a:lstStyle/>
+          <a:p>
+            <a:pPr algn="ctr"/>
+          </a:p>
+        </p:txBody>
+      </p:sp>
+      <p:sp>
+        <p:nvSpPr>
+          <p:cNvPr id="34" name="TextBox 33"/>
+          <p:cNvSpPr txBox="1"/>
+          <p:nvPr/>
+        </p:nvSpPr>
+        <p:spPr>
+          <a:xfrm>
+            <a:off x="914400" y="7891272"/>
+            <a:ext cx="4023360" cy="329184"/>
+          </a:xfrm>
+          <a:prstGeom prst="rect">
+            <a:avLst/>
+          </a:prstGeom>
+          <a:noFill/>
+        </p:spPr>
+        <p:txBody>
+          <a:bodyPr wrap="square" lIns="0" rIns="0" tIns="0" bIns="0" anchor="t">
+            <a:spAutoFit/>
+          </a:bodyPr>
+          <a:lstStyle/>
+          <a:p>
+            <a:pPr algn="l">
+              <a:lnSpc>
+                <a:spcPct val="100000"/>
+              </a:lnSpc>
+              <a:spcBef>
+                <a:spcPts val="0"/>
+              </a:spcBef>
+              <a:spcAft>
+                <a:spcPts val="0"/>
+              </a:spcAft>
+            </a:pPr>
+            <a:r>
+              <a:rPr sz="1550" b="1" i="0">
+                <a:solidFill>
+                  <a:srgbClr val="F3F6FA"/>
+                </a:solidFill>
                 <a:latin typeface="Georgia"/>
               </a:rPr>
-              <a:t>Queremos apresentar a conta exata para o seu banco — 20 minutos com quem construiu a plataforma. É só responder o e-mail que trouxe esta página.</a:t>
+              <a:t>0,08% a.a. · piso R$ 100/mês</a:t>
+            </a:r>
+          </a:p>
+        </p:txBody>
+      </p:sp>
+      <p:sp>
+        <p:nvSpPr>
+          <p:cNvPr id="35" name="TextBox 34"/>
+          <p:cNvSpPr txBox="1"/>
+          <p:nvPr/>
+        </p:nvSpPr>
+        <p:spPr>
+          <a:xfrm>
+            <a:off x="914400" y="8257031"/>
+            <a:ext cx="4206240" cy="256032"/>
+          </a:xfrm>
+          <a:prstGeom prst="rect">
+            <a:avLst/>
+          </a:prstGeom>
+          <a:noFill/>
+        </p:spPr>
+        <p:txBody>
+          <a:bodyPr wrap="square" lIns="0" rIns="0" tIns="0" bIns="0" anchor="t">
+            <a:spAutoFit/>
+          </a:bodyPr>
+          <a:lstStyle/>
+          <a:p>
+            <a:pPr algn="l">
+              <a:lnSpc>
+                <a:spcPct val="100000"/>
+              </a:lnSpc>
+              <a:spcBef>
+                <a:spcPts val="0"/>
+              </a:spcBef>
+              <a:spcAft>
+                <a:spcPts val="0"/>
+              </a:spcAft>
+            </a:pPr>
+            <a:r>
+              <a:rPr sz="830" b="0" i="0">
+                <a:solidFill>
+                  <a:srgbClr val="A8B6C6"/>
+                </a:solidFill>
+                <a:latin typeface="Calibri"/>
+              </a:rPr>
+              <a:t>A taxa mais competitiva do mercado — 10–40× abaixo dos pisos praticados.</a:t>
+            </a:r>
+          </a:p>
+        </p:txBody>
+      </p:sp>
+      <p:sp>
+        <p:nvSpPr>
+          <p:cNvPr id="36" name="TextBox 35"/>
+          <p:cNvSpPr txBox="1"/>
+          <p:nvPr/>
+        </p:nvSpPr>
+        <p:spPr>
+          <a:xfrm>
+            <a:off x="4407407" y="7909560"/>
+            <a:ext cx="2240280" cy="548640"/>
+          </a:xfrm>
+          <a:prstGeom prst="rect">
+            <a:avLst/>
+          </a:prstGeom>
+          <a:noFill/>
+        </p:spPr>
+        <p:txBody>
+          <a:bodyPr wrap="square" lIns="0" rIns="0" tIns="0" bIns="0" anchor="t">
+            <a:spAutoFit/>
+          </a:bodyPr>
+          <a:lstStyle/>
+          <a:p>
+            <a:pPr algn="r">
+              <a:lnSpc>
+                <a:spcPct val="118000"/>
+              </a:lnSpc>
+              <a:spcBef>
+                <a:spcPts val="0"/>
+              </a:spcBef>
+              <a:spcAft>
+                <a:spcPts val="0"/>
+              </a:spcAft>
+            </a:pPr>
+            <a:r>
+              <a:rPr sz="830" b="0" i="0" spc="20">
+                <a:solidFill>
+                  <a:srgbClr val="CFEEFB"/>
+                </a:solidFill>
+                <a:latin typeface="Consolas"/>
+              </a:rPr>
+              <a:t>fundo de R$ 1 milhão:</a:t>
+            </a:r>
+          </a:p>
+          <a:p>
+            <a:pPr algn="r">
+              <a:lnSpc>
+                <a:spcPct val="118000"/>
+              </a:lnSpc>
+              <a:spcBef>
+                <a:spcPts val="0"/>
+              </a:spcBef>
+              <a:spcAft>
+                <a:spcPts val="0"/>
+              </a:spcAft>
+            </a:pPr>
+            <a:r>
+              <a:rPr sz="830" b="0" i="0" spc="20">
+                <a:solidFill>
+                  <a:srgbClr val="CFEEFB"/>
+                </a:solidFill>
+                <a:latin typeface="Consolas"/>
+              </a:rPr>
+              <a:t>≈ R$ 1.200/ano — contra</a:t>
+            </a:r>
+          </a:p>
+          <a:p>
+            <a:pPr algn="r">
+              <a:lnSpc>
+                <a:spcPct val="118000"/>
+              </a:lnSpc>
+              <a:spcBef>
+                <a:spcPts val="0"/>
+              </a:spcBef>
+              <a:spcAft>
+                <a:spcPts val="0"/>
+              </a:spcAft>
+            </a:pPr>
+            <a:r>
+              <a:rPr sz="830" b="0" i="0" spc="20">
+                <a:solidFill>
+                  <a:srgbClr val="CFEEFB"/>
+                </a:solidFill>
+                <a:latin typeface="Consolas"/>
+              </a:rPr>
+              <a:t>R$ 150–300 mil hoje</a:t>
             </a:r>
           </a:p>
         </p:txBody>
       </p:sp>
       <p:cxnSp>
         <p:nvCxnSpPr>
-          <p:cNvPr id="32" name="Connector 31"/>
+          <p:cNvPr id="37" name="Connector 36"/>
           <p:cNvCxnSpPr/>
           <p:nvPr/>
         </p:nvCxnSpPr>
         <p:spPr>
           <a:xfrm>
-            <a:off x="640080" y="10232136"/>
-            <a:ext cx="6281927" cy="0"/>
+            <a:off x="640080" y="8759952"/>
+            <a:ext cx="219456" cy="0"/>
           </a:xfrm>
           <a:prstGeom prst="line">
             <a:avLst/>
           </a:prstGeom>
-          <a:ln w="9525">
+          <a:ln w="20320">
             <a:solidFill>
-              <a:srgbClr val="E7E8F2"/>
+              <a:srgbClr val="1FC0EF"/>
             </a:solidFill>
           </a:ln>
           <a:effectLst/>
@@ -4483,14 +4712,233 @@
       </p:cxnSp>
       <p:sp>
         <p:nvSpPr>
-          <p:cNvPr id="33" name="TextBox 32"/>
+          <p:cNvPr id="38" name="TextBox 37"/>
           <p:cNvSpPr txBox="1"/>
           <p:nvPr/>
         </p:nvSpPr>
         <p:spPr>
           <a:xfrm>
-            <a:off x="640080" y="10341863"/>
-            <a:ext cx="3840480" cy="228600"/>
+            <a:off x="950976" y="8686800"/>
+            <a:ext cx="6035040" cy="228600"/>
+          </a:xfrm>
+          <a:prstGeom prst="rect">
+            <a:avLst/>
+          </a:prstGeom>
+          <a:noFill/>
+        </p:spPr>
+        <p:txBody>
+          <a:bodyPr wrap="square" lIns="0" rIns="0" tIns="0" bIns="0" anchor="t">
+            <a:spAutoFit/>
+          </a:bodyPr>
+          <a:lstStyle/>
+          <a:p>
+            <a:pPr algn="l">
+              <a:lnSpc>
+                <a:spcPct val="100000"/>
+              </a:lnSpc>
+              <a:spcBef>
+                <a:spcPts val="0"/>
+              </a:spcBef>
+              <a:spcAft>
+                <a:spcPts val="0"/>
+              </a:spcAft>
+            </a:pPr>
+            <a:r>
+              <a:rPr sz="850" b="0" i="0" spc="180">
+                <a:solidFill>
+                  <a:srgbClr val="1FC0EF"/>
+                </a:solidFill>
+                <a:latin typeface="Consolas"/>
+              </a:rPr>
+              <a:t>O QUE PROPOMOS AO SEU BANCO</a:t>
+            </a:r>
+          </a:p>
+        </p:txBody>
+      </p:sp>
+      <p:sp>
+        <p:nvSpPr>
+          <p:cNvPr id="39" name="TextBox 38"/>
+          <p:cNvSpPr txBox="1"/>
+          <p:nvPr/>
+        </p:nvSpPr>
+        <p:spPr>
+          <a:xfrm>
+            <a:off x="640080" y="8933688"/>
+            <a:ext cx="6281927" cy="731520"/>
+          </a:xfrm>
+          <a:prstGeom prst="rect">
+            <a:avLst/>
+          </a:prstGeom>
+          <a:noFill/>
+        </p:spPr>
+        <p:txBody>
+          <a:bodyPr wrap="square" lIns="0" rIns="0" tIns="0" bIns="0" anchor="t">
+            <a:spAutoFit/>
+          </a:bodyPr>
+          <a:lstStyle/>
+          <a:p>
+            <a:pPr algn="l">
+              <a:lnSpc>
+                <a:spcPct val="110000"/>
+              </a:lnSpc>
+              <a:spcBef>
+                <a:spcPts val="0"/>
+              </a:spcBef>
+              <a:spcAft>
+                <a:spcPts val="0"/>
+              </a:spcAft>
+            </a:pPr>
+            <a:r>
+              <a:rPr sz="919" b="0" i="0">
+                <a:solidFill>
+                  <a:srgbClr val="2B3232"/>
+                </a:solidFill>
+                <a:latin typeface="Calibri"/>
+              </a:rPr>
+              <a:t>Administração fiduciária e custódia são privativas de instituição autorizada pelo BCB — e é aí que entra o banco: licença, estrutura jurídica e o compliance que já exerce. Nós entramos com tecnologia, equipe, operação e todos os custos (não buscamos investimento); a contrapartida é participação nos lucros, sem o banco absorver despesa. Caminho: carta de intenções → credenciamento na CVM (dossiê pronto, prazo legal de 60 dias) → produção sob a marca do banco → custódia própria (Res. 32). Piloto no ar: argusdtvm.com.br/piloto — o tour anexo percorre cada tela.</a:t>
+            </a:r>
+          </a:p>
+        </p:txBody>
+      </p:sp>
+      <p:sp>
+        <p:nvSpPr>
+          <p:cNvPr id="40" name="Rounded Rectangle 39"/>
+          <p:cNvSpPr/>
+          <p:nvPr/>
+        </p:nvSpPr>
+        <p:spPr>
+          <a:xfrm>
+            <a:off x="640080" y="9729216"/>
+            <a:ext cx="6281927" cy="402336"/>
+          </a:xfrm>
+          <a:prstGeom prst="roundRect">
+            <a:avLst>
+              <a:gd name="adj" fmla="val 14000"/>
+            </a:avLst>
+          </a:prstGeom>
+          <a:solidFill>
+            <a:srgbClr val="F4F5FB"/>
+          </a:solidFill>
+          <a:ln w="12700">
+            <a:solidFill>
+              <a:srgbClr val="1FC0EF"/>
+            </a:solidFill>
+          </a:ln>
+          <a:effectLst/>
+        </p:spPr>
+        <p:style>
+          <a:lnRef idx="1">
+            <a:schemeClr val="accent1"/>
+          </a:lnRef>
+          <a:fillRef idx="3">
+            <a:schemeClr val="accent1"/>
+          </a:fillRef>
+          <a:effectRef idx="2">
+            <a:schemeClr val="accent1"/>
+          </a:effectRef>
+          <a:fontRef idx="minor">
+            <a:schemeClr val="lt1"/>
+          </a:fontRef>
+        </p:style>
+        <p:txBody>
+          <a:bodyPr rtlCol="0" anchor="ctr"/>
+          <a:lstStyle/>
+          <a:p>
+            <a:pPr algn="ctr"/>
+          </a:p>
+        </p:txBody>
+      </p:sp>
+      <p:sp>
+        <p:nvSpPr>
+          <p:cNvPr id="41" name="TextBox 40"/>
+          <p:cNvSpPr txBox="1"/>
+          <p:nvPr/>
+        </p:nvSpPr>
+        <p:spPr>
+          <a:xfrm>
+            <a:off x="877824" y="9802368"/>
+            <a:ext cx="5806440" cy="274320"/>
+          </a:xfrm>
+          <a:prstGeom prst="rect">
+            <a:avLst/>
+          </a:prstGeom>
+          <a:noFill/>
+        </p:spPr>
+        <p:txBody>
+          <a:bodyPr wrap="square" lIns="0" rIns="0" tIns="0" bIns="0" anchor="t">
+            <a:spAutoFit/>
+          </a:bodyPr>
+          <a:lstStyle/>
+          <a:p>
+            <a:pPr algn="l">
+              <a:lnSpc>
+                <a:spcPct val="108000"/>
+              </a:lnSpc>
+              <a:spcBef>
+                <a:spcPts val="0"/>
+              </a:spcBef>
+              <a:spcAft>
+                <a:spcPts val="0"/>
+              </a:spcAft>
+            </a:pPr>
+            <a:r>
+              <a:rPr sz="930" b="0" i="1">
+                <a:solidFill>
+                  <a:srgbClr val="2B3232"/>
+                </a:solidFill>
+                <a:latin typeface="Georgia"/>
+              </a:rPr>
+              <a:t>Queremos abrir essa conta com os números do seu banco — 20 minutos com quem construiu a plataforma. É só responder o e-mail.</a:t>
+            </a:r>
+          </a:p>
+        </p:txBody>
+      </p:sp>
+      <p:cxnSp>
+        <p:nvCxnSpPr>
+          <p:cNvPr id="42" name="Connector 41"/>
+          <p:cNvCxnSpPr/>
+          <p:nvPr/>
+        </p:nvCxnSpPr>
+        <p:spPr>
+          <a:xfrm>
+            <a:off x="640080" y="10268711"/>
+            <a:ext cx="6281927" cy="0"/>
+          </a:xfrm>
+          <a:prstGeom prst="line">
+            <a:avLst/>
+          </a:prstGeom>
+          <a:ln w="9525">
+            <a:solidFill>
+              <a:srgbClr val="E7E8F2"/>
+            </a:solidFill>
+          </a:ln>
+          <a:effectLst/>
+        </p:spPr>
+        <p:style>
+          <a:lnRef idx="2">
+            <a:schemeClr val="accent1"/>
+          </a:lnRef>
+          <a:fillRef idx="0">
+            <a:schemeClr val="accent1"/>
+          </a:fillRef>
+          <a:effectRef idx="1">
+            <a:schemeClr val="accent1"/>
+          </a:effectRef>
+          <a:fontRef idx="minor">
+            <a:schemeClr val="tx1"/>
+          </a:fontRef>
+        </p:style>
+      </p:cxnSp>
+      <p:sp>
+        <p:nvSpPr>
+          <p:cNvPr id="43" name="TextBox 42"/>
+          <p:cNvSpPr txBox="1"/>
+          <p:nvPr/>
+        </p:nvSpPr>
+        <p:spPr>
+          <a:xfrm>
+            <a:off x="640080" y="10369296"/>
+            <a:ext cx="4206240" cy="228600"/>
           </a:xfrm>
           <a:prstGeom prst="rect">
             <a:avLst/>
@@ -4521,20 +4969,20 @@
                 </a:solidFill>
                 <a:latin typeface="Consolas"/>
               </a:rPr>
-              <a:t>contato@argusdtvm.com.br  ·  argusdtvm.com.br</a:t>
-            </a:r>
-          </a:p>
-        </p:txBody>
-      </p:sp>
-      <p:sp>
-        <p:nvSpPr>
-          <p:cNvPr id="34" name="TextBox 33"/>
+              <a:t>vinicius.fernandes@argusdtvm.com.br  ·  argusdtvm.com.br</a:t>
+            </a:r>
+          </a:p>
+        </p:txBody>
+      </p:sp>
+      <p:sp>
+        <p:nvSpPr>
+          <p:cNvPr id="44" name="TextBox 43"/>
           <p:cNvSpPr txBox="1"/>
           <p:nvPr/>
         </p:nvSpPr>
         <p:spPr>
           <a:xfrm>
-            <a:off x="4270248" y="10341863"/>
+            <a:off x="4270248" y="10369296"/>
             <a:ext cx="2651760" cy="228600"/>
           </a:xfrm>
           <a:prstGeom prst="rect">
